--- a/10-Knowledge-Products/KP4-DSD/videos/module_1/en/decks/KP4_M1_1.4_Deck_v0.1.pptx
+++ b/10-Knowledge-Products/KP4-DSD/videos/module_1/en/decks/KP4_M1_1.4_Deck_v0.1.pptx
@@ -21,7 +21,6 @@
     <p:sldId id="2725" r:id="rId16"/>
     <p:sldId id="2726" r:id="rId15"/>
     <p:sldId id="2727" r:id="rId14"/>
-    <p:sldId id="2728" r:id="rId13"/>
   </p:sldIdLst>
   <p:sldSz cx="12192000" cy="6858000"/>
   <p:notesSz cx="6858000" cy="9144000"/>
@@ -1155,7 +1154,13 @@
           <a:p/>
           <a:p>
             <a:r>
-              <a:t>Slide specification: The documents are named by what they are for; no numbers of folders, no file names. The footer says the catalogue is not one of the twelve.</a:t>
+              <a:t>VO: The next three are written for each goal in turn: the goal as a story with every way it can fail, the screens worked out from that story, and a walk-through that officials can click. Then come two documents for the whole application: the interaction design, which settles once how officers pick, find, move and act, and the application model, the one file a program reads. The twelfth is the working application. Nobody writes it. A program generates it from the model, and nobody edits it by hand.</a:t>
+            </a:r>
+          </a:p>
+          <a:p/>
+          <a:p>
+            <a:r>
+              <a:t>Slide specification: Figure F3, its slide variant (figures/slides/F3_twelve-documents.png, drawn by the figure's own program in slide mode): the twelve names numbered 1 to 12 in two columns of six under four headings (before any design; one goal at a time; the whole application, once; generated by a program); the documents are named by what they are for, no file names; the footer says the catalogue is not one of the twelve; boxes, arrows and words only, no imagery and no person on screen. The rows are its text equivalent. Calibration item: a drawn figure under ITU's text-only rule.</a:t>
             </a:r>
           </a:p>
         </p:txBody>
@@ -1225,13 +1230,13 @@
           <a:lstStyle/>
           <a:p>
             <a:r>
-              <a:t>VO: The next three are written for each goal in turn: the goal as a story with every way it can fail, the screens worked out from that story, and a walk-through that officials can click. Then come two documents for the whole application: the interaction design, which settles once how officers pick, find, move and act, and the application model, the one file a program reads. The twelfth is the working application. Nobody writes it. A program generates it from the model, and nobody edits it by hand.</a:t>
+              <a:t>VO: In Progressa, PHEQA filled this table for its registration of institutions. For the register, an AI assistant extracts the entries, the supplier's analyst rules on each one, and the Registrar of PHEQA accepts it. For the screens of a goal, three people decide at a review: the owner of the screens, the builder, and the head of the registration desk. For the application model, the head of PHEQA's ICT unit approves it after reading what it assumed. And the working application is accepted when a registration officer finishes a real task on it.</a:t>
             </a:r>
           </a:p>
           <a:p/>
           <a:p>
             <a:r>
-              <a:t>Slide specification: Same layout as slide 3, so slides 3 and 4 read as one list of twelve. Text-only.</a:t>
+              <a:t>Slide specification: An extract of the filled table; the full table of twelve is in the written guide. Progressa's names as the plan gives them.</a:t>
             </a:r>
           </a:p>
         </p:txBody>
@@ -1301,13 +1306,13 @@
           <a:lstStyle/>
           <a:p>
             <a:r>
-              <a:t>VO: In Progressa, PHEQA filled this table for its registration of institutions. For the register, an AI assistant extracts the entries, the supplier's analyst rules on each one, and the Registrar of PHEQA accepts it. For the screens of a goal, three people decide at a review: the owner of the screens, the builder, and the head of the registration desk. For the application model, the head of PHEQA's ICT unit approves it after reading what it assumed. And the working application is accepted when a registration officer finishes a real task on it.</a:t>
+              <a:t>VO: Count the points where a person in PHEQA must say yes before the work goes on. There are nine. At each one, the next document is written from what was accepted, not from what was proposed. Two documents are written by nobody: a program produces the walk-through and the working application. Now lay your own project's documents beside the twelve. A missing row is a decision nobody will take in writing. A row with no point of acceptance is a place where the supplier, not your organisation, decides.</a:t>
             </a:r>
           </a:p>
           <a:p/>
           <a:p>
             <a:r>
-              <a:t>Slide specification: An extract of the filled table; the full table of twelve is in the written guide. Progressa's names as the plan gives them.</a:t>
+              <a:t>Slide specification: The figure nine is counted from the filled table of the worked example. Text-only.</a:t>
             </a:r>
           </a:p>
         </p:txBody>
@@ -1333,82 +1338,6 @@
 </file>
 
 <file path=ppt/notesSlides/notesSlide34.xml><?xml version="1.0" encoding="utf-8"?>
-<p:notes xmlns:a="http://schemas.openxmlformats.org/drawingml/2006/main" xmlns:p="http://schemas.openxmlformats.org/presentationml/2006/main" xmlns:r="http://schemas.openxmlformats.org/officeDocument/2006/relationships">
-  <p:cSld>
-    <p:spTree>
-      <p:nvGrpSpPr>
-        <p:cNvPr id="1" name=""/>
-        <p:cNvGrpSpPr/>
-        <p:nvPr/>
-      </p:nvGrpSpPr>
-      <p:grpSpPr>
-        <a:xfrm>
-          <a:off x="0" y="0"/>
-          <a:ext cx="0" cy="0"/>
-          <a:chOff x="0" y="0"/>
-          <a:chExt cx="0" cy="0"/>
-        </a:xfrm>
-      </p:grpSpPr>
-      <p:sp>
-        <p:nvSpPr>
-          <p:cNvPr id="2" name="Slide Image Placeholder 1"/>
-          <p:cNvSpPr>
-            <a:spLocks noGrp="1"/>
-          </p:cNvSpPr>
-          <p:nvPr>
-            <p:ph type="sldImg" idx="2"/>
-          </p:nvPr>
-        </p:nvSpPr>
-        <p:spPr/>
-      </p:sp>
-      <p:sp>
-        <p:nvSpPr>
-          <p:cNvPr id="3" name="Notes Placeholder 2"/>
-          <p:cNvSpPr>
-            <a:spLocks noGrp="1"/>
-          </p:cNvSpPr>
-          <p:nvPr>
-            <p:ph type="body" idx="3" sz="quarter"/>
-          </p:nvPr>
-        </p:nvSpPr>
-        <p:spPr/>
-        <p:txBody>
-          <a:bodyPr/>
-          <a:lstStyle/>
-          <a:p>
-            <a:r>
-              <a:t>VO: Count the points where a person in PHEQA must say yes before the work goes on. There are nine. At each one, the next document is written from what was accepted, not from what was proposed. Two documents are written by nobody: a program produces the walk-through and the working application. Now lay your own project's documents beside the twelve. A missing row is a decision nobody will take in writing. A row with no point of acceptance is a place where the supplier, not your organisation, decides.</a:t>
-            </a:r>
-          </a:p>
-          <a:p/>
-          <a:p>
-            <a:r>
-              <a:t>Slide specification: The figure nine is counted from the filled table of the worked example. Text-only.</a:t>
-            </a:r>
-          </a:p>
-        </p:txBody>
-      </p:sp>
-      <p:sp>
-        <p:nvSpPr>
-          <p:cNvPr id="4" name="Slide Number Placeholder 3"/>
-          <p:cNvSpPr>
-            <a:spLocks noGrp="1"/>
-          </p:cNvSpPr>
-          <p:nvPr>
-            <p:ph type="sldNum" idx="5" sz="quarter"/>
-          </p:nvPr>
-        </p:nvSpPr>
-        <p:spPr/>
-      </p:sp>
-    </p:spTree>
-  </p:cSld>
-  <p:clrMapOvr>
-    <a:masterClrMapping/>
-  </p:clrMapOvr>
-</p:notes>
-</file>
-
-<file path=ppt/notesSlides/notesSlide35.xml><?xml version="1.0" encoding="utf-8"?>
 <p:notes xmlns:a="http://schemas.openxmlformats.org/drawingml/2006/main" xmlns:p="http://schemas.openxmlformats.org/presentationml/2006/main" xmlns:r="http://schemas.openxmlformats.org/officeDocument/2006/relationships">
   <p:cSld>
     <p:spTree>
@@ -12608,64 +12537,35 @@
                 </a:solidFill>
                 <a:latin typeface="Arial"/>
               </a:rPr>
-              <a:t>Before any design: six documents</a:t>
-            </a:r>
-          </a:p>
-        </p:txBody>
-      </p:sp>
-      <p:sp>
-        <p:nvSpPr>
-          <p:cNvPr id="4" name="Oval 3"/>
-          <p:cNvSpPr/>
+              <a:t>Twelve documents, in a fixed order</a:t>
+            </a:r>
+          </a:p>
+        </p:txBody>
+      </p:sp>
+      <p:pic>
+        <p:nvPicPr>
+          <p:cNvPr id="4" name="kp4-figure F3" descr="F3_twelve-documents.png"/>
+          <p:cNvPicPr>
+            <a:picLocks noChangeAspect="1"/>
+          </p:cNvPicPr>
           <p:nvPr/>
-        </p:nvSpPr>
-        <p:spPr>
-          <a:xfrm>
-            <a:off x="621792" y="1508760"/>
-            <a:ext cx="310896" cy="310896"/>
-          </a:xfrm>
-          <a:prstGeom prst="ellipse">
+        </p:nvPicPr>
+        <p:blipFill>
+          <a:blip r:embed="rId2"/>
+          <a:stretch>
+            <a:fillRect/>
+          </a:stretch>
+        </p:blipFill>
+        <p:spPr>
+          <a:xfrm>
+            <a:off x="1558534" y="1280160"/>
+            <a:ext cx="9081027" cy="4526280"/>
+          </a:xfrm>
+          <a:prstGeom prst="rect">
             <a:avLst/>
           </a:prstGeom>
-          <a:solidFill>
-            <a:srgbClr val="009CD6"/>
-          </a:solidFill>
-          <a:ln>
-            <a:noFill/>
-          </a:ln>
-          <a:effectLst/>
-        </p:spPr>
-        <p:style>
-          <a:lnRef idx="1">
-            <a:schemeClr val="accent1"/>
-          </a:lnRef>
-          <a:fillRef idx="3">
-            <a:schemeClr val="accent1"/>
-          </a:fillRef>
-          <a:effectRef idx="2">
-            <a:schemeClr val="accent1"/>
-          </a:effectRef>
-          <a:fontRef idx="minor">
-            <a:schemeClr val="lt1"/>
-          </a:fontRef>
-        </p:style>
-        <p:txBody>
-          <a:bodyPr rtlCol="0" anchor="ctr" lIns="0" rIns="0" tIns="0" bIns="0" wrap="square"/>
-          <a:lstStyle/>
-          <a:p>
-            <a:pPr algn="ctr"/>
-            <a:r>
-              <a:rPr sz="1300" b="1" i="0">
-                <a:solidFill>
-                  <a:srgbClr val="FFFFFF"/>
-                </a:solidFill>
-                <a:latin typeface="Arial"/>
-              </a:rPr>
-              <a:t>1</a:t>
-            </a:r>
-          </a:p>
-        </p:txBody>
-      </p:sp>
+        </p:spPr>
+      </p:pic>
       <p:sp>
         <p:nvSpPr>
           <p:cNvPr id="5" name="TextBox 4"/>
@@ -12674,727 +12574,8 @@
         </p:nvSpPr>
         <p:spPr>
           <a:xfrm>
-            <a:off x="1115568" y="1463040"/>
-            <a:ext cx="10527487" cy="670559"/>
-          </a:xfrm>
-          <a:prstGeom prst="rect">
-            <a:avLst/>
-          </a:prstGeom>
-          <a:noFill/>
-        </p:spPr>
-        <p:txBody>
-          <a:bodyPr wrap="square">
-            <a:spAutoFit/>
-          </a:bodyPr>
-          <a:lstStyle/>
-          <a:p>
-            <a:pPr>
-              <a:spcAft>
-                <a:spcPts val="300"/>
-              </a:spcAft>
-            </a:pPr>
-            <a:r>
-              <a:rPr sz="1900" b="1" i="0">
-                <a:solidFill>
-                  <a:srgbClr val="1A1A1A"/>
-                </a:solidFill>
-                <a:latin typeface="Arial"/>
-              </a:rPr>
-              <a:t>Your own documents: the law, the mandate, the requests.</a:t>
-            </a:r>
-          </a:p>
-        </p:txBody>
-      </p:sp>
-      <p:sp>
-        <p:nvSpPr>
-          <p:cNvPr id="6" name="Rectangle 5"/>
-          <p:cNvSpPr/>
-          <p:nvPr/>
-        </p:nvSpPr>
-        <p:spPr>
-          <a:xfrm>
-            <a:off x="621792" y="2138172"/>
-            <a:ext cx="10881360" cy="12700"/>
-          </a:xfrm>
-          <a:prstGeom prst="rect">
-            <a:avLst/>
-          </a:prstGeom>
-          <a:solidFill>
-            <a:srgbClr val="DDECF4"/>
-          </a:solidFill>
-          <a:ln>
-            <a:noFill/>
-          </a:ln>
-          <a:effectLst/>
-        </p:spPr>
-        <p:style>
-          <a:lnRef idx="1">
-            <a:schemeClr val="accent1"/>
-          </a:lnRef>
-          <a:fillRef idx="3">
-            <a:schemeClr val="accent1"/>
-          </a:fillRef>
-          <a:effectRef idx="2">
-            <a:schemeClr val="accent1"/>
-          </a:effectRef>
-          <a:fontRef idx="minor">
-            <a:schemeClr val="lt1"/>
-          </a:fontRef>
-        </p:style>
-        <p:txBody>
-          <a:bodyPr rtlCol="0" anchor="ctr"/>
-          <a:lstStyle/>
-          <a:p>
-            <a:pPr algn="ctr"/>
-          </a:p>
-        </p:txBody>
-      </p:sp>
-      <p:sp>
-        <p:nvSpPr>
-          <p:cNvPr id="7" name="Oval 6"/>
-          <p:cNvSpPr/>
-          <p:nvPr/>
-        </p:nvSpPr>
-        <p:spPr>
-          <a:xfrm>
-            <a:off x="621792" y="2225040"/>
-            <a:ext cx="310896" cy="310896"/>
-          </a:xfrm>
-          <a:prstGeom prst="ellipse">
-            <a:avLst/>
-          </a:prstGeom>
-          <a:solidFill>
-            <a:srgbClr val="009CD6"/>
-          </a:solidFill>
-          <a:ln>
-            <a:noFill/>
-          </a:ln>
-          <a:effectLst/>
-        </p:spPr>
-        <p:style>
-          <a:lnRef idx="1">
-            <a:schemeClr val="accent1"/>
-          </a:lnRef>
-          <a:fillRef idx="3">
-            <a:schemeClr val="accent1"/>
-          </a:fillRef>
-          <a:effectRef idx="2">
-            <a:schemeClr val="accent1"/>
-          </a:effectRef>
-          <a:fontRef idx="minor">
-            <a:schemeClr val="lt1"/>
-          </a:fontRef>
-        </p:style>
-        <p:txBody>
-          <a:bodyPr rtlCol="0" anchor="ctr" lIns="0" rIns="0" tIns="0" bIns="0" wrap="square"/>
-          <a:lstStyle/>
-          <a:p>
-            <a:pPr algn="ctr"/>
-            <a:r>
-              <a:rPr sz="1300" b="1" i="0">
-                <a:solidFill>
-                  <a:srgbClr val="FFFFFF"/>
-                </a:solidFill>
-                <a:latin typeface="Arial"/>
-              </a:rPr>
-              <a:t>2</a:t>
-            </a:r>
-          </a:p>
-        </p:txBody>
-      </p:sp>
-      <p:sp>
-        <p:nvSpPr>
-          <p:cNvPr id="8" name="TextBox 7"/>
-          <p:cNvSpPr txBox="1"/>
-          <p:nvPr/>
-        </p:nvSpPr>
-        <p:spPr>
-          <a:xfrm>
-            <a:off x="1115568" y="2179320"/>
-            <a:ext cx="10527487" cy="670559"/>
-          </a:xfrm>
-          <a:prstGeom prst="rect">
-            <a:avLst/>
-          </a:prstGeom>
-          <a:noFill/>
-        </p:spPr>
-        <p:txBody>
-          <a:bodyPr wrap="square">
-            <a:spAutoFit/>
-          </a:bodyPr>
-          <a:lstStyle/>
-          <a:p>
-            <a:pPr>
-              <a:spcAft>
-                <a:spcPts val="300"/>
-              </a:spcAft>
-            </a:pPr>
-            <a:r>
-              <a:rPr sz="1900" b="1" i="0">
-                <a:solidFill>
-                  <a:srgbClr val="1A1A1A"/>
-                </a:solidFill>
-                <a:latin typeface="Arial"/>
-              </a:rPr>
-              <a:t>The register of what was asked.</a:t>
-            </a:r>
-          </a:p>
-        </p:txBody>
-      </p:sp>
-      <p:sp>
-        <p:nvSpPr>
-          <p:cNvPr id="9" name="Rectangle 8"/>
-          <p:cNvSpPr/>
-          <p:nvPr/>
-        </p:nvSpPr>
-        <p:spPr>
-          <a:xfrm>
-            <a:off x="621792" y="2854452"/>
-            <a:ext cx="10881360" cy="12700"/>
-          </a:xfrm>
-          <a:prstGeom prst="rect">
-            <a:avLst/>
-          </a:prstGeom>
-          <a:solidFill>
-            <a:srgbClr val="DDECF4"/>
-          </a:solidFill>
-          <a:ln>
-            <a:noFill/>
-          </a:ln>
-          <a:effectLst/>
-        </p:spPr>
-        <p:style>
-          <a:lnRef idx="1">
-            <a:schemeClr val="accent1"/>
-          </a:lnRef>
-          <a:fillRef idx="3">
-            <a:schemeClr val="accent1"/>
-          </a:fillRef>
-          <a:effectRef idx="2">
-            <a:schemeClr val="accent1"/>
-          </a:effectRef>
-          <a:fontRef idx="minor">
-            <a:schemeClr val="lt1"/>
-          </a:fontRef>
-        </p:style>
-        <p:txBody>
-          <a:bodyPr rtlCol="0" anchor="ctr"/>
-          <a:lstStyle/>
-          <a:p>
-            <a:pPr algn="ctr"/>
-          </a:p>
-        </p:txBody>
-      </p:sp>
-      <p:sp>
-        <p:nvSpPr>
-          <p:cNvPr id="10" name="Oval 9"/>
-          <p:cNvSpPr/>
-          <p:nvPr/>
-        </p:nvSpPr>
-        <p:spPr>
-          <a:xfrm>
-            <a:off x="621792" y="2941319"/>
-            <a:ext cx="310896" cy="310896"/>
-          </a:xfrm>
-          <a:prstGeom prst="ellipse">
-            <a:avLst/>
-          </a:prstGeom>
-          <a:solidFill>
-            <a:srgbClr val="009CD6"/>
-          </a:solidFill>
-          <a:ln>
-            <a:noFill/>
-          </a:ln>
-          <a:effectLst/>
-        </p:spPr>
-        <p:style>
-          <a:lnRef idx="1">
-            <a:schemeClr val="accent1"/>
-          </a:lnRef>
-          <a:fillRef idx="3">
-            <a:schemeClr val="accent1"/>
-          </a:fillRef>
-          <a:effectRef idx="2">
-            <a:schemeClr val="accent1"/>
-          </a:effectRef>
-          <a:fontRef idx="minor">
-            <a:schemeClr val="lt1"/>
-          </a:fontRef>
-        </p:style>
-        <p:txBody>
-          <a:bodyPr rtlCol="0" anchor="ctr" lIns="0" rIns="0" tIns="0" bIns="0" wrap="square"/>
-          <a:lstStyle/>
-          <a:p>
-            <a:pPr algn="ctr"/>
-            <a:r>
-              <a:rPr sz="1300" b="1" i="0">
-                <a:solidFill>
-                  <a:srgbClr val="FFFFFF"/>
-                </a:solidFill>
-                <a:latin typeface="Arial"/>
-              </a:rPr>
-              <a:t>3</a:t>
-            </a:r>
-          </a:p>
-        </p:txBody>
-      </p:sp>
-      <p:sp>
-        <p:nvSpPr>
-          <p:cNvPr id="11" name="TextBox 10"/>
-          <p:cNvSpPr txBox="1"/>
-          <p:nvPr/>
-        </p:nvSpPr>
-        <p:spPr>
-          <a:xfrm>
-            <a:off x="1115568" y="2895600"/>
-            <a:ext cx="10527487" cy="670559"/>
-          </a:xfrm>
-          <a:prstGeom prst="rect">
-            <a:avLst/>
-          </a:prstGeom>
-          <a:noFill/>
-        </p:spPr>
-        <p:txBody>
-          <a:bodyPr wrap="square">
-            <a:spAutoFit/>
-          </a:bodyPr>
-          <a:lstStyle/>
-          <a:p>
-            <a:pPr>
-              <a:spcAft>
-                <a:spcPts val="300"/>
-              </a:spcAft>
-            </a:pPr>
-            <a:r>
-              <a:rPr sz="1900" b="1" i="0">
-                <a:solidFill>
-                  <a:srgbClr val="1A1A1A"/>
-                </a:solidFill>
-                <a:latin typeface="Arial"/>
-              </a:rPr>
-              <a:t>The records the service keeps.</a:t>
-            </a:r>
-          </a:p>
-        </p:txBody>
-      </p:sp>
-      <p:sp>
-        <p:nvSpPr>
-          <p:cNvPr id="12" name="Rectangle 11"/>
-          <p:cNvSpPr/>
-          <p:nvPr/>
-        </p:nvSpPr>
-        <p:spPr>
-          <a:xfrm>
-            <a:off x="621792" y="3570732"/>
-            <a:ext cx="10881360" cy="12700"/>
-          </a:xfrm>
-          <a:prstGeom prst="rect">
-            <a:avLst/>
-          </a:prstGeom>
-          <a:solidFill>
-            <a:srgbClr val="DDECF4"/>
-          </a:solidFill>
-          <a:ln>
-            <a:noFill/>
-          </a:ln>
-          <a:effectLst/>
-        </p:spPr>
-        <p:style>
-          <a:lnRef idx="1">
-            <a:schemeClr val="accent1"/>
-          </a:lnRef>
-          <a:fillRef idx="3">
-            <a:schemeClr val="accent1"/>
-          </a:fillRef>
-          <a:effectRef idx="2">
-            <a:schemeClr val="accent1"/>
-          </a:effectRef>
-          <a:fontRef idx="minor">
-            <a:schemeClr val="lt1"/>
-          </a:fontRef>
-        </p:style>
-        <p:txBody>
-          <a:bodyPr rtlCol="0" anchor="ctr"/>
-          <a:lstStyle/>
-          <a:p>
-            <a:pPr algn="ctr"/>
-          </a:p>
-        </p:txBody>
-      </p:sp>
-      <p:sp>
-        <p:nvSpPr>
-          <p:cNvPr id="13" name="Oval 12"/>
-          <p:cNvSpPr/>
-          <p:nvPr/>
-        </p:nvSpPr>
-        <p:spPr>
-          <a:xfrm>
-            <a:off x="621792" y="3657599"/>
-            <a:ext cx="310896" cy="310896"/>
-          </a:xfrm>
-          <a:prstGeom prst="ellipse">
-            <a:avLst/>
-          </a:prstGeom>
-          <a:solidFill>
-            <a:srgbClr val="009CD6"/>
-          </a:solidFill>
-          <a:ln>
-            <a:noFill/>
-          </a:ln>
-          <a:effectLst/>
-        </p:spPr>
-        <p:style>
-          <a:lnRef idx="1">
-            <a:schemeClr val="accent1"/>
-          </a:lnRef>
-          <a:fillRef idx="3">
-            <a:schemeClr val="accent1"/>
-          </a:fillRef>
-          <a:effectRef idx="2">
-            <a:schemeClr val="accent1"/>
-          </a:effectRef>
-          <a:fontRef idx="minor">
-            <a:schemeClr val="lt1"/>
-          </a:fontRef>
-        </p:style>
-        <p:txBody>
-          <a:bodyPr rtlCol="0" anchor="ctr" lIns="0" rIns="0" tIns="0" bIns="0" wrap="square"/>
-          <a:lstStyle/>
-          <a:p>
-            <a:pPr algn="ctr"/>
-            <a:r>
-              <a:rPr sz="1300" b="1" i="0">
-                <a:solidFill>
-                  <a:srgbClr val="FFFFFF"/>
-                </a:solidFill>
-                <a:latin typeface="Arial"/>
-              </a:rPr>
-              <a:t>4</a:t>
-            </a:r>
-          </a:p>
-        </p:txBody>
-      </p:sp>
-      <p:sp>
-        <p:nvSpPr>
-          <p:cNvPr id="14" name="TextBox 13"/>
-          <p:cNvSpPr txBox="1"/>
-          <p:nvPr/>
-        </p:nvSpPr>
-        <p:spPr>
-          <a:xfrm>
-            <a:off x="1115568" y="3611879"/>
-            <a:ext cx="10527487" cy="670559"/>
-          </a:xfrm>
-          <a:prstGeom prst="rect">
-            <a:avLst/>
-          </a:prstGeom>
-          <a:noFill/>
-        </p:spPr>
-        <p:txBody>
-          <a:bodyPr wrap="square">
-            <a:spAutoFit/>
-          </a:bodyPr>
-          <a:lstStyle/>
-          <a:p>
-            <a:pPr>
-              <a:spcAft>
-                <a:spcPts val="300"/>
-              </a:spcAft>
-            </a:pPr>
-            <a:r>
-              <a:rPr sz="1900" b="1" i="0">
-                <a:solidFill>
-                  <a:srgbClr val="1A1A1A"/>
-                </a:solidFill>
-                <a:latin typeface="Arial"/>
-              </a:rPr>
-              <a:t>Every goal, tied to what was asked.</a:t>
-            </a:r>
-          </a:p>
-        </p:txBody>
-      </p:sp>
-      <p:sp>
-        <p:nvSpPr>
-          <p:cNvPr id="15" name="Rectangle 14"/>
-          <p:cNvSpPr/>
-          <p:nvPr/>
-        </p:nvSpPr>
-        <p:spPr>
-          <a:xfrm>
-            <a:off x="621792" y="4287011"/>
-            <a:ext cx="10881360" cy="12700"/>
-          </a:xfrm>
-          <a:prstGeom prst="rect">
-            <a:avLst/>
-          </a:prstGeom>
-          <a:solidFill>
-            <a:srgbClr val="DDECF4"/>
-          </a:solidFill>
-          <a:ln>
-            <a:noFill/>
-          </a:ln>
-          <a:effectLst/>
-        </p:spPr>
-        <p:style>
-          <a:lnRef idx="1">
-            <a:schemeClr val="accent1"/>
-          </a:lnRef>
-          <a:fillRef idx="3">
-            <a:schemeClr val="accent1"/>
-          </a:fillRef>
-          <a:effectRef idx="2">
-            <a:schemeClr val="accent1"/>
-          </a:effectRef>
-          <a:fontRef idx="minor">
-            <a:schemeClr val="lt1"/>
-          </a:fontRef>
-        </p:style>
-        <p:txBody>
-          <a:bodyPr rtlCol="0" anchor="ctr"/>
-          <a:lstStyle/>
-          <a:p>
-            <a:pPr algn="ctr"/>
-          </a:p>
-        </p:txBody>
-      </p:sp>
-      <p:sp>
-        <p:nvSpPr>
-          <p:cNvPr id="16" name="Oval 15"/>
-          <p:cNvSpPr/>
-          <p:nvPr/>
-        </p:nvSpPr>
-        <p:spPr>
-          <a:xfrm>
-            <a:off x="621792" y="4373879"/>
-            <a:ext cx="310896" cy="310896"/>
-          </a:xfrm>
-          <a:prstGeom prst="ellipse">
-            <a:avLst/>
-          </a:prstGeom>
-          <a:solidFill>
-            <a:srgbClr val="009CD6"/>
-          </a:solidFill>
-          <a:ln>
-            <a:noFill/>
-          </a:ln>
-          <a:effectLst/>
-        </p:spPr>
-        <p:style>
-          <a:lnRef idx="1">
-            <a:schemeClr val="accent1"/>
-          </a:lnRef>
-          <a:fillRef idx="3">
-            <a:schemeClr val="accent1"/>
-          </a:fillRef>
-          <a:effectRef idx="2">
-            <a:schemeClr val="accent1"/>
-          </a:effectRef>
-          <a:fontRef idx="minor">
-            <a:schemeClr val="lt1"/>
-          </a:fontRef>
-        </p:style>
-        <p:txBody>
-          <a:bodyPr rtlCol="0" anchor="ctr" lIns="0" rIns="0" tIns="0" bIns="0" wrap="square"/>
-          <a:lstStyle/>
-          <a:p>
-            <a:pPr algn="ctr"/>
-            <a:r>
-              <a:rPr sz="1300" b="1" i="0">
-                <a:solidFill>
-                  <a:srgbClr val="FFFFFF"/>
-                </a:solidFill>
-                <a:latin typeface="Arial"/>
-              </a:rPr>
-              <a:t>5</a:t>
-            </a:r>
-          </a:p>
-        </p:txBody>
-      </p:sp>
-      <p:sp>
-        <p:nvSpPr>
-          <p:cNvPr id="17" name="TextBox 16"/>
-          <p:cNvSpPr txBox="1"/>
-          <p:nvPr/>
-        </p:nvSpPr>
-        <p:spPr>
-          <a:xfrm>
-            <a:off x="1115568" y="4328159"/>
-            <a:ext cx="10527487" cy="670559"/>
-          </a:xfrm>
-          <a:prstGeom prst="rect">
-            <a:avLst/>
-          </a:prstGeom>
-          <a:noFill/>
-        </p:spPr>
-        <p:txBody>
-          <a:bodyPr wrap="square">
-            <a:spAutoFit/>
-          </a:bodyPr>
-          <a:lstStyle/>
-          <a:p>
-            <a:pPr>
-              <a:spcAft>
-                <a:spcPts val="300"/>
-              </a:spcAft>
-            </a:pPr>
-            <a:r>
-              <a:rPr sz="1900" b="1" i="0">
-                <a:solidFill>
-                  <a:srgbClr val="1A1A1A"/>
-                </a:solidFill>
-                <a:latin typeface="Arial"/>
-              </a:rPr>
-              <a:t>The architecture.</a:t>
-            </a:r>
-          </a:p>
-        </p:txBody>
-      </p:sp>
-      <p:sp>
-        <p:nvSpPr>
-          <p:cNvPr id="18" name="Rectangle 17"/>
-          <p:cNvSpPr/>
-          <p:nvPr/>
-        </p:nvSpPr>
-        <p:spPr>
-          <a:xfrm>
-            <a:off x="621792" y="5003291"/>
-            <a:ext cx="10881360" cy="12700"/>
-          </a:xfrm>
-          <a:prstGeom prst="rect">
-            <a:avLst/>
-          </a:prstGeom>
-          <a:solidFill>
-            <a:srgbClr val="DDECF4"/>
-          </a:solidFill>
-          <a:ln>
-            <a:noFill/>
-          </a:ln>
-          <a:effectLst/>
-        </p:spPr>
-        <p:style>
-          <a:lnRef idx="1">
-            <a:schemeClr val="accent1"/>
-          </a:lnRef>
-          <a:fillRef idx="3">
-            <a:schemeClr val="accent1"/>
-          </a:fillRef>
-          <a:effectRef idx="2">
-            <a:schemeClr val="accent1"/>
-          </a:effectRef>
-          <a:fontRef idx="minor">
-            <a:schemeClr val="lt1"/>
-          </a:fontRef>
-        </p:style>
-        <p:txBody>
-          <a:bodyPr rtlCol="0" anchor="ctr"/>
-          <a:lstStyle/>
-          <a:p>
-            <a:pPr algn="ctr"/>
-          </a:p>
-        </p:txBody>
-      </p:sp>
-      <p:sp>
-        <p:nvSpPr>
-          <p:cNvPr id="19" name="Oval 18"/>
-          <p:cNvSpPr/>
-          <p:nvPr/>
-        </p:nvSpPr>
-        <p:spPr>
-          <a:xfrm>
-            <a:off x="621792" y="5090159"/>
-            <a:ext cx="310896" cy="310896"/>
-          </a:xfrm>
-          <a:prstGeom prst="ellipse">
-            <a:avLst/>
-          </a:prstGeom>
-          <a:solidFill>
-            <a:srgbClr val="009CD6"/>
-          </a:solidFill>
-          <a:ln>
-            <a:noFill/>
-          </a:ln>
-          <a:effectLst/>
-        </p:spPr>
-        <p:style>
-          <a:lnRef idx="1">
-            <a:schemeClr val="accent1"/>
-          </a:lnRef>
-          <a:fillRef idx="3">
-            <a:schemeClr val="accent1"/>
-          </a:fillRef>
-          <a:effectRef idx="2">
-            <a:schemeClr val="accent1"/>
-          </a:effectRef>
-          <a:fontRef idx="minor">
-            <a:schemeClr val="lt1"/>
-          </a:fontRef>
-        </p:style>
-        <p:txBody>
-          <a:bodyPr rtlCol="0" anchor="ctr" lIns="0" rIns="0" tIns="0" bIns="0" wrap="square"/>
-          <a:lstStyle/>
-          <a:p>
-            <a:pPr algn="ctr"/>
-            <a:r>
-              <a:rPr sz="1300" b="1" i="0">
-                <a:solidFill>
-                  <a:srgbClr val="FFFFFF"/>
-                </a:solidFill>
-                <a:latin typeface="Arial"/>
-              </a:rPr>
-              <a:t>6</a:t>
-            </a:r>
-          </a:p>
-        </p:txBody>
-      </p:sp>
-      <p:sp>
-        <p:nvSpPr>
-          <p:cNvPr id="20" name="TextBox 19"/>
-          <p:cNvSpPr txBox="1"/>
-          <p:nvPr/>
-        </p:nvSpPr>
-        <p:spPr>
-          <a:xfrm>
-            <a:off x="1115568" y="5044439"/>
-            <a:ext cx="10527487" cy="670559"/>
-          </a:xfrm>
-          <a:prstGeom prst="rect">
-            <a:avLst/>
-          </a:prstGeom>
-          <a:noFill/>
-        </p:spPr>
-        <p:txBody>
-          <a:bodyPr wrap="square">
-            <a:spAutoFit/>
-          </a:bodyPr>
-          <a:lstStyle/>
-          <a:p>
-            <a:pPr>
-              <a:spcAft>
-                <a:spcPts val="300"/>
-              </a:spcAft>
-            </a:pPr>
-            <a:r>
-              <a:rPr sz="1900" b="1" i="0">
-                <a:solidFill>
-                  <a:srgbClr val="1A1A1A"/>
-                </a:solidFill>
-                <a:latin typeface="Arial"/>
-              </a:rPr>
-              <a:t>The shared states, settings and lists.</a:t>
-            </a:r>
-          </a:p>
-        </p:txBody>
-      </p:sp>
-      <p:sp>
-        <p:nvSpPr>
-          <p:cNvPr id="21" name="TextBox 20"/>
-          <p:cNvSpPr txBox="1"/>
-          <p:nvPr/>
-        </p:nvSpPr>
-        <p:spPr>
-          <a:xfrm>
-            <a:off x="658368" y="5870448"/>
-            <a:ext cx="10881360" cy="548640"/>
+            <a:off x="658368" y="5916168"/>
+            <a:ext cx="10881360" cy="457200"/>
           </a:xfrm>
           <a:prstGeom prst="rect">
             <a:avLst/>
@@ -13421,7 +12602,7 @@
       </p:sp>
       <p:sp>
         <p:nvSpPr>
-          <p:cNvPr id="22" name="TextBox 21"/>
+          <p:cNvPr id="6" name="TextBox 5"/>
           <p:cNvSpPr txBox="1"/>
           <p:nvPr/>
         </p:nvSpPr>
@@ -13544,27 +12725,66 @@
                 </a:solidFill>
                 <a:latin typeface="Arial"/>
               </a:rPr>
-              <a:t>One goal at a time, then the whole application</a:t>
-            </a:r>
-          </a:p>
-        </p:txBody>
-      </p:sp>
-      <p:sp>
-        <p:nvSpPr>
-          <p:cNvPr id="4" name="Oval 3"/>
+              <a:t>Filled for PHEQA's registration of institutions</a:t>
+            </a:r>
+          </a:p>
+        </p:txBody>
+      </p:sp>
+      <p:sp>
+        <p:nvSpPr>
+          <p:cNvPr id="4" name="TextBox 3"/>
+          <p:cNvSpPr txBox="1"/>
+          <p:nvPr/>
+        </p:nvSpPr>
+        <p:spPr>
+          <a:xfrm>
+            <a:off x="658368" y="1463040"/>
+            <a:ext cx="10984687" cy="1131570"/>
+          </a:xfrm>
+          <a:prstGeom prst="rect">
+            <a:avLst/>
+          </a:prstGeom>
+          <a:noFill/>
+        </p:spPr>
+        <p:txBody>
+          <a:bodyPr wrap="square">
+            <a:spAutoFit/>
+          </a:bodyPr>
+          <a:lstStyle/>
+          <a:p>
+            <a:pPr>
+              <a:spcAft>
+                <a:spcPts val="300"/>
+              </a:spcAft>
+            </a:pPr>
+            <a:r>
+              <a:rPr sz="1750" b="1" i="0">
+                <a:solidFill>
+                  <a:srgbClr val="1A1A1A"/>
+                </a:solidFill>
+                <a:latin typeface="Arial"/>
+              </a:rPr>
+              <a:t>The register: an AI assistant extracts it; the supplier's analyst rules on each entry; the Registrar of PHEQA accepts.</a:t>
+            </a:r>
+          </a:p>
+        </p:txBody>
+      </p:sp>
+      <p:sp>
+        <p:nvSpPr>
+          <p:cNvPr id="5" name="Rectangle 4"/>
           <p:cNvSpPr/>
           <p:nvPr/>
         </p:nvSpPr>
         <p:spPr>
           <a:xfrm>
-            <a:off x="621792" y="1508760"/>
-            <a:ext cx="310896" cy="310896"/>
-          </a:xfrm>
-          <a:prstGeom prst="ellipse">
+            <a:off x="621792" y="2599182"/>
+            <a:ext cx="10881360" cy="12700"/>
+          </a:xfrm>
+          <a:prstGeom prst="rect">
             <a:avLst/>
           </a:prstGeom>
           <a:solidFill>
-            <a:srgbClr val="009CD6"/>
+            <a:srgbClr val="DDECF4"/>
           </a:solidFill>
           <a:ln>
             <a:noFill/>
@@ -13586,32 +12806,23 @@
           </a:fontRef>
         </p:style>
         <p:txBody>
-          <a:bodyPr rtlCol="0" anchor="ctr" lIns="0" rIns="0" tIns="0" bIns="0" wrap="square"/>
+          <a:bodyPr rtlCol="0" anchor="ctr"/>
           <a:lstStyle/>
           <a:p>
             <a:pPr algn="ctr"/>
-            <a:r>
-              <a:rPr sz="1300" b="1" i="0">
-                <a:solidFill>
-                  <a:srgbClr val="FFFFFF"/>
-                </a:solidFill>
-                <a:latin typeface="Arial"/>
-              </a:rPr>
-              <a:t>1</a:t>
-            </a:r>
-          </a:p>
-        </p:txBody>
-      </p:sp>
-      <p:sp>
-        <p:nvSpPr>
-          <p:cNvPr id="5" name="TextBox 4"/>
+          </a:p>
+        </p:txBody>
+      </p:sp>
+      <p:sp>
+        <p:nvSpPr>
+          <p:cNvPr id="6" name="TextBox 5"/>
           <p:cNvSpPr txBox="1"/>
           <p:nvPr/>
         </p:nvSpPr>
         <p:spPr>
           <a:xfrm>
-            <a:off x="1115568" y="1463040"/>
-            <a:ext cx="10527487" cy="739140"/>
+            <a:off x="658368" y="2640330"/>
+            <a:ext cx="10984687" cy="1131570"/>
           </a:xfrm>
           <a:prstGeom prst="rect">
             <a:avLst/>
@@ -13630,26 +12841,26 @@
               </a:spcAft>
             </a:pPr>
             <a:r>
-              <a:rPr sz="1900" b="1" i="0">
+              <a:rPr sz="1750" b="1" i="0">
                 <a:solidFill>
                   <a:srgbClr val="1A1A1A"/>
                 </a:solidFill>
                 <a:latin typeface="Arial"/>
               </a:rPr>
-              <a:t>One goal, written as a story.</a:t>
-            </a:r>
-          </a:p>
-        </p:txBody>
-      </p:sp>
-      <p:sp>
-        <p:nvSpPr>
-          <p:cNvPr id="6" name="Rectangle 5"/>
+              <a:t>The screens of a goal: the analyst who wrote the goal; the review of three people decides.</a:t>
+            </a:r>
+          </a:p>
+        </p:txBody>
+      </p:sp>
+      <p:sp>
+        <p:nvSpPr>
+          <p:cNvPr id="7" name="Rectangle 6"/>
           <p:cNvSpPr/>
           <p:nvPr/>
         </p:nvSpPr>
         <p:spPr>
           <a:xfrm>
-            <a:off x="621792" y="2206752"/>
+            <a:off x="621792" y="3776472"/>
             <a:ext cx="10881360" cy="12700"/>
           </a:xfrm>
           <a:prstGeom prst="rect">
@@ -13687,20 +12898,59 @@
       </p:sp>
       <p:sp>
         <p:nvSpPr>
-          <p:cNvPr id="7" name="Oval 6"/>
+          <p:cNvPr id="8" name="TextBox 7"/>
+          <p:cNvSpPr txBox="1"/>
+          <p:nvPr/>
+        </p:nvSpPr>
+        <p:spPr>
+          <a:xfrm>
+            <a:off x="658368" y="3817620"/>
+            <a:ext cx="10984687" cy="1131570"/>
+          </a:xfrm>
+          <a:prstGeom prst="rect">
+            <a:avLst/>
+          </a:prstGeom>
+          <a:noFill/>
+        </p:spPr>
+        <p:txBody>
+          <a:bodyPr wrap="square">
+            <a:spAutoFit/>
+          </a:bodyPr>
+          <a:lstStyle/>
+          <a:p>
+            <a:pPr>
+              <a:spcAft>
+                <a:spcPts val="300"/>
+              </a:spcAft>
+            </a:pPr>
+            <a:r>
+              <a:rPr sz="1750" b="1" i="0">
+                <a:solidFill>
+                  <a:srgbClr val="1A1A1A"/>
+                </a:solidFill>
+                <a:latin typeface="Arial"/>
+              </a:rPr>
+              <a:t>The application model: an AI assistant writes it; the head of the ICT unit approves.</a:t>
+            </a:r>
+          </a:p>
+        </p:txBody>
+      </p:sp>
+      <p:sp>
+        <p:nvSpPr>
+          <p:cNvPr id="9" name="Rectangle 8"/>
           <p:cNvSpPr/>
           <p:nvPr/>
         </p:nvSpPr>
         <p:spPr>
           <a:xfrm>
-            <a:off x="621792" y="2293620"/>
-            <a:ext cx="310896" cy="310896"/>
-          </a:xfrm>
-          <a:prstGeom prst="ellipse">
+            <a:off x="621792" y="4953762"/>
+            <a:ext cx="10881360" cy="12700"/>
+          </a:xfrm>
+          <a:prstGeom prst="rect">
             <a:avLst/>
           </a:prstGeom>
           <a:solidFill>
-            <a:srgbClr val="009CD6"/>
+            <a:srgbClr val="DDECF4"/>
           </a:solidFill>
           <a:ln>
             <a:noFill/>
@@ -13722,32 +12972,23 @@
           </a:fontRef>
         </p:style>
         <p:txBody>
-          <a:bodyPr rtlCol="0" anchor="ctr" lIns="0" rIns="0" tIns="0" bIns="0" wrap="square"/>
+          <a:bodyPr rtlCol="0" anchor="ctr"/>
           <a:lstStyle/>
           <a:p>
             <a:pPr algn="ctr"/>
-            <a:r>
-              <a:rPr sz="1300" b="1" i="0">
-                <a:solidFill>
-                  <a:srgbClr val="FFFFFF"/>
-                </a:solidFill>
-                <a:latin typeface="Arial"/>
-              </a:rPr>
-              <a:t>2</a:t>
-            </a:r>
-          </a:p>
-        </p:txBody>
-      </p:sp>
-      <p:sp>
-        <p:nvSpPr>
-          <p:cNvPr id="8" name="TextBox 7"/>
+          </a:p>
+        </p:txBody>
+      </p:sp>
+      <p:sp>
+        <p:nvSpPr>
+          <p:cNvPr id="10" name="TextBox 9"/>
           <p:cNvSpPr txBox="1"/>
           <p:nvPr/>
         </p:nvSpPr>
         <p:spPr>
           <a:xfrm>
-            <a:off x="1115568" y="2247900"/>
-            <a:ext cx="10527487" cy="739140"/>
+            <a:off x="658368" y="4994910"/>
+            <a:ext cx="10984687" cy="1131570"/>
           </a:xfrm>
           <a:prstGeom prst="rect">
             <a:avLst/>
@@ -13766,110 +13007,13 @@
               </a:spcAft>
             </a:pPr>
             <a:r>
-              <a:rPr sz="1900" b="1" i="0">
+              <a:rPr sz="1750" b="1" i="0">
                 <a:solidFill>
                   <a:srgbClr val="1A1A1A"/>
                 </a:solidFill>
                 <a:latin typeface="Arial"/>
               </a:rPr>
-              <a:t>The screens of that goal.</a:t>
-            </a:r>
-          </a:p>
-        </p:txBody>
-      </p:sp>
-      <p:sp>
-        <p:nvSpPr>
-          <p:cNvPr id="9" name="Rectangle 8"/>
-          <p:cNvSpPr/>
-          <p:nvPr/>
-        </p:nvSpPr>
-        <p:spPr>
-          <a:xfrm>
-            <a:off x="621792" y="2991612"/>
-            <a:ext cx="10881360" cy="12700"/>
-          </a:xfrm>
-          <a:prstGeom prst="rect">
-            <a:avLst/>
-          </a:prstGeom>
-          <a:solidFill>
-            <a:srgbClr val="DDECF4"/>
-          </a:solidFill>
-          <a:ln>
-            <a:noFill/>
-          </a:ln>
-          <a:effectLst/>
-        </p:spPr>
-        <p:style>
-          <a:lnRef idx="1">
-            <a:schemeClr val="accent1"/>
-          </a:lnRef>
-          <a:fillRef idx="3">
-            <a:schemeClr val="accent1"/>
-          </a:fillRef>
-          <a:effectRef idx="2">
-            <a:schemeClr val="accent1"/>
-          </a:effectRef>
-          <a:fontRef idx="minor">
-            <a:schemeClr val="lt1"/>
-          </a:fontRef>
-        </p:style>
-        <p:txBody>
-          <a:bodyPr rtlCol="0" anchor="ctr"/>
-          <a:lstStyle/>
-          <a:p>
-            <a:pPr algn="ctr"/>
-          </a:p>
-        </p:txBody>
-      </p:sp>
-      <p:sp>
-        <p:nvSpPr>
-          <p:cNvPr id="10" name="Oval 9"/>
-          <p:cNvSpPr/>
-          <p:nvPr/>
-        </p:nvSpPr>
-        <p:spPr>
-          <a:xfrm>
-            <a:off x="621792" y="3078480"/>
-            <a:ext cx="310896" cy="310896"/>
-          </a:xfrm>
-          <a:prstGeom prst="ellipse">
-            <a:avLst/>
-          </a:prstGeom>
-          <a:solidFill>
-            <a:srgbClr val="009CD6"/>
-          </a:solidFill>
-          <a:ln>
-            <a:noFill/>
-          </a:ln>
-          <a:effectLst/>
-        </p:spPr>
-        <p:style>
-          <a:lnRef idx="1">
-            <a:schemeClr val="accent1"/>
-          </a:lnRef>
-          <a:fillRef idx="3">
-            <a:schemeClr val="accent1"/>
-          </a:fillRef>
-          <a:effectRef idx="2">
-            <a:schemeClr val="accent1"/>
-          </a:effectRef>
-          <a:fontRef idx="minor">
-            <a:schemeClr val="lt1"/>
-          </a:fontRef>
-        </p:style>
-        <p:txBody>
-          <a:bodyPr rtlCol="0" anchor="ctr" lIns="0" rIns="0" tIns="0" bIns="0" wrap="square"/>
-          <a:lstStyle/>
-          <a:p>
-            <a:pPr algn="ctr"/>
-            <a:r>
-              <a:rPr sz="1300" b="1" i="0">
-                <a:solidFill>
-                  <a:srgbClr val="FFFFFF"/>
-                </a:solidFill>
-                <a:latin typeface="Arial"/>
-              </a:rPr>
-              <a:t>3</a:t>
+              <a:t>The working application: a registration officer finishes a real task on it.</a:t>
             </a:r>
           </a:p>
         </p:txBody>
@@ -13877,453 +13021,6 @@
       <p:sp>
         <p:nvSpPr>
           <p:cNvPr id="11" name="TextBox 10"/>
-          <p:cNvSpPr txBox="1"/>
-          <p:nvPr/>
-        </p:nvSpPr>
-        <p:spPr>
-          <a:xfrm>
-            <a:off x="1115568" y="3032760"/>
-            <a:ext cx="10527487" cy="739140"/>
-          </a:xfrm>
-          <a:prstGeom prst="rect">
-            <a:avLst/>
-          </a:prstGeom>
-          <a:noFill/>
-        </p:spPr>
-        <p:txBody>
-          <a:bodyPr wrap="square">
-            <a:spAutoFit/>
-          </a:bodyPr>
-          <a:lstStyle/>
-          <a:p>
-            <a:pPr>
-              <a:spcAft>
-                <a:spcPts val="300"/>
-              </a:spcAft>
-            </a:pPr>
-            <a:r>
-              <a:rPr sz="1900" b="1" i="0">
-                <a:solidFill>
-                  <a:srgbClr val="1A1A1A"/>
-                </a:solidFill>
-                <a:latin typeface="Arial"/>
-              </a:rPr>
-              <a:t>The walk-through.</a:t>
-            </a:r>
-          </a:p>
-        </p:txBody>
-      </p:sp>
-      <p:sp>
-        <p:nvSpPr>
-          <p:cNvPr id="12" name="Rectangle 11"/>
-          <p:cNvSpPr/>
-          <p:nvPr/>
-        </p:nvSpPr>
-        <p:spPr>
-          <a:xfrm>
-            <a:off x="621792" y="3776472"/>
-            <a:ext cx="10881360" cy="12700"/>
-          </a:xfrm>
-          <a:prstGeom prst="rect">
-            <a:avLst/>
-          </a:prstGeom>
-          <a:solidFill>
-            <a:srgbClr val="DDECF4"/>
-          </a:solidFill>
-          <a:ln>
-            <a:noFill/>
-          </a:ln>
-          <a:effectLst/>
-        </p:spPr>
-        <p:style>
-          <a:lnRef idx="1">
-            <a:schemeClr val="accent1"/>
-          </a:lnRef>
-          <a:fillRef idx="3">
-            <a:schemeClr val="accent1"/>
-          </a:fillRef>
-          <a:effectRef idx="2">
-            <a:schemeClr val="accent1"/>
-          </a:effectRef>
-          <a:fontRef idx="minor">
-            <a:schemeClr val="lt1"/>
-          </a:fontRef>
-        </p:style>
-        <p:txBody>
-          <a:bodyPr rtlCol="0" anchor="ctr"/>
-          <a:lstStyle/>
-          <a:p>
-            <a:pPr algn="ctr"/>
-          </a:p>
-        </p:txBody>
-      </p:sp>
-      <p:sp>
-        <p:nvSpPr>
-          <p:cNvPr id="13" name="Oval 12"/>
-          <p:cNvSpPr/>
-          <p:nvPr/>
-        </p:nvSpPr>
-        <p:spPr>
-          <a:xfrm>
-            <a:off x="621792" y="3863340"/>
-            <a:ext cx="310896" cy="310896"/>
-          </a:xfrm>
-          <a:prstGeom prst="ellipse">
-            <a:avLst/>
-          </a:prstGeom>
-          <a:solidFill>
-            <a:srgbClr val="009CD6"/>
-          </a:solidFill>
-          <a:ln>
-            <a:noFill/>
-          </a:ln>
-          <a:effectLst/>
-        </p:spPr>
-        <p:style>
-          <a:lnRef idx="1">
-            <a:schemeClr val="accent1"/>
-          </a:lnRef>
-          <a:fillRef idx="3">
-            <a:schemeClr val="accent1"/>
-          </a:fillRef>
-          <a:effectRef idx="2">
-            <a:schemeClr val="accent1"/>
-          </a:effectRef>
-          <a:fontRef idx="minor">
-            <a:schemeClr val="lt1"/>
-          </a:fontRef>
-        </p:style>
-        <p:txBody>
-          <a:bodyPr rtlCol="0" anchor="ctr" lIns="0" rIns="0" tIns="0" bIns="0" wrap="square"/>
-          <a:lstStyle/>
-          <a:p>
-            <a:pPr algn="ctr"/>
-            <a:r>
-              <a:rPr sz="1300" b="1" i="0">
-                <a:solidFill>
-                  <a:srgbClr val="FFFFFF"/>
-                </a:solidFill>
-                <a:latin typeface="Arial"/>
-              </a:rPr>
-              <a:t>4</a:t>
-            </a:r>
-          </a:p>
-        </p:txBody>
-      </p:sp>
-      <p:sp>
-        <p:nvSpPr>
-          <p:cNvPr id="14" name="TextBox 13"/>
-          <p:cNvSpPr txBox="1"/>
-          <p:nvPr/>
-        </p:nvSpPr>
-        <p:spPr>
-          <a:xfrm>
-            <a:off x="1115568" y="3817620"/>
-            <a:ext cx="10527487" cy="739140"/>
-          </a:xfrm>
-          <a:prstGeom prst="rect">
-            <a:avLst/>
-          </a:prstGeom>
-          <a:noFill/>
-        </p:spPr>
-        <p:txBody>
-          <a:bodyPr wrap="square">
-            <a:spAutoFit/>
-          </a:bodyPr>
-          <a:lstStyle/>
-          <a:p>
-            <a:pPr>
-              <a:spcAft>
-                <a:spcPts val="300"/>
-              </a:spcAft>
-            </a:pPr>
-            <a:r>
-              <a:rPr sz="1900" b="1" i="0">
-                <a:solidFill>
-                  <a:srgbClr val="1A1A1A"/>
-                </a:solidFill>
-                <a:latin typeface="Arial"/>
-              </a:rPr>
-              <a:t>The interaction design.</a:t>
-            </a:r>
-          </a:p>
-        </p:txBody>
-      </p:sp>
-      <p:sp>
-        <p:nvSpPr>
-          <p:cNvPr id="15" name="Rectangle 14"/>
-          <p:cNvSpPr/>
-          <p:nvPr/>
-        </p:nvSpPr>
-        <p:spPr>
-          <a:xfrm>
-            <a:off x="621792" y="4561332"/>
-            <a:ext cx="10881360" cy="12700"/>
-          </a:xfrm>
-          <a:prstGeom prst="rect">
-            <a:avLst/>
-          </a:prstGeom>
-          <a:solidFill>
-            <a:srgbClr val="DDECF4"/>
-          </a:solidFill>
-          <a:ln>
-            <a:noFill/>
-          </a:ln>
-          <a:effectLst/>
-        </p:spPr>
-        <p:style>
-          <a:lnRef idx="1">
-            <a:schemeClr val="accent1"/>
-          </a:lnRef>
-          <a:fillRef idx="3">
-            <a:schemeClr val="accent1"/>
-          </a:fillRef>
-          <a:effectRef idx="2">
-            <a:schemeClr val="accent1"/>
-          </a:effectRef>
-          <a:fontRef idx="minor">
-            <a:schemeClr val="lt1"/>
-          </a:fontRef>
-        </p:style>
-        <p:txBody>
-          <a:bodyPr rtlCol="0" anchor="ctr"/>
-          <a:lstStyle/>
-          <a:p>
-            <a:pPr algn="ctr"/>
-          </a:p>
-        </p:txBody>
-      </p:sp>
-      <p:sp>
-        <p:nvSpPr>
-          <p:cNvPr id="16" name="Oval 15"/>
-          <p:cNvSpPr/>
-          <p:nvPr/>
-        </p:nvSpPr>
-        <p:spPr>
-          <a:xfrm>
-            <a:off x="621792" y="4648200"/>
-            <a:ext cx="310896" cy="310896"/>
-          </a:xfrm>
-          <a:prstGeom prst="ellipse">
-            <a:avLst/>
-          </a:prstGeom>
-          <a:solidFill>
-            <a:srgbClr val="009CD6"/>
-          </a:solidFill>
-          <a:ln>
-            <a:noFill/>
-          </a:ln>
-          <a:effectLst/>
-        </p:spPr>
-        <p:style>
-          <a:lnRef idx="1">
-            <a:schemeClr val="accent1"/>
-          </a:lnRef>
-          <a:fillRef idx="3">
-            <a:schemeClr val="accent1"/>
-          </a:fillRef>
-          <a:effectRef idx="2">
-            <a:schemeClr val="accent1"/>
-          </a:effectRef>
-          <a:fontRef idx="minor">
-            <a:schemeClr val="lt1"/>
-          </a:fontRef>
-        </p:style>
-        <p:txBody>
-          <a:bodyPr rtlCol="0" anchor="ctr" lIns="0" rIns="0" tIns="0" bIns="0" wrap="square"/>
-          <a:lstStyle/>
-          <a:p>
-            <a:pPr algn="ctr"/>
-            <a:r>
-              <a:rPr sz="1300" b="1" i="0">
-                <a:solidFill>
-                  <a:srgbClr val="FFFFFF"/>
-                </a:solidFill>
-                <a:latin typeface="Arial"/>
-              </a:rPr>
-              <a:t>5</a:t>
-            </a:r>
-          </a:p>
-        </p:txBody>
-      </p:sp>
-      <p:sp>
-        <p:nvSpPr>
-          <p:cNvPr id="17" name="TextBox 16"/>
-          <p:cNvSpPr txBox="1"/>
-          <p:nvPr/>
-        </p:nvSpPr>
-        <p:spPr>
-          <a:xfrm>
-            <a:off x="1115568" y="4602480"/>
-            <a:ext cx="10527487" cy="739140"/>
-          </a:xfrm>
-          <a:prstGeom prst="rect">
-            <a:avLst/>
-          </a:prstGeom>
-          <a:noFill/>
-        </p:spPr>
-        <p:txBody>
-          <a:bodyPr wrap="square">
-            <a:spAutoFit/>
-          </a:bodyPr>
-          <a:lstStyle/>
-          <a:p>
-            <a:pPr>
-              <a:spcAft>
-                <a:spcPts val="300"/>
-              </a:spcAft>
-            </a:pPr>
-            <a:r>
-              <a:rPr sz="1900" b="1" i="0">
-                <a:solidFill>
-                  <a:srgbClr val="1A1A1A"/>
-                </a:solidFill>
-                <a:latin typeface="Arial"/>
-              </a:rPr>
-              <a:t>The application model: the file a program reads.</a:t>
-            </a:r>
-          </a:p>
-        </p:txBody>
-      </p:sp>
-      <p:sp>
-        <p:nvSpPr>
-          <p:cNvPr id="18" name="Rectangle 17"/>
-          <p:cNvSpPr/>
-          <p:nvPr/>
-        </p:nvSpPr>
-        <p:spPr>
-          <a:xfrm>
-            <a:off x="621792" y="5346192"/>
-            <a:ext cx="10881360" cy="12700"/>
-          </a:xfrm>
-          <a:prstGeom prst="rect">
-            <a:avLst/>
-          </a:prstGeom>
-          <a:solidFill>
-            <a:srgbClr val="DDECF4"/>
-          </a:solidFill>
-          <a:ln>
-            <a:noFill/>
-          </a:ln>
-          <a:effectLst/>
-        </p:spPr>
-        <p:style>
-          <a:lnRef idx="1">
-            <a:schemeClr val="accent1"/>
-          </a:lnRef>
-          <a:fillRef idx="3">
-            <a:schemeClr val="accent1"/>
-          </a:fillRef>
-          <a:effectRef idx="2">
-            <a:schemeClr val="accent1"/>
-          </a:effectRef>
-          <a:fontRef idx="minor">
-            <a:schemeClr val="lt1"/>
-          </a:fontRef>
-        </p:style>
-        <p:txBody>
-          <a:bodyPr rtlCol="0" anchor="ctr"/>
-          <a:lstStyle/>
-          <a:p>
-            <a:pPr algn="ctr"/>
-          </a:p>
-        </p:txBody>
-      </p:sp>
-      <p:sp>
-        <p:nvSpPr>
-          <p:cNvPr id="19" name="Oval 18"/>
-          <p:cNvSpPr/>
-          <p:nvPr/>
-        </p:nvSpPr>
-        <p:spPr>
-          <a:xfrm>
-            <a:off x="621792" y="5433060"/>
-            <a:ext cx="310896" cy="310896"/>
-          </a:xfrm>
-          <a:prstGeom prst="ellipse">
-            <a:avLst/>
-          </a:prstGeom>
-          <a:solidFill>
-            <a:srgbClr val="009CD6"/>
-          </a:solidFill>
-          <a:ln>
-            <a:noFill/>
-          </a:ln>
-          <a:effectLst/>
-        </p:spPr>
-        <p:style>
-          <a:lnRef idx="1">
-            <a:schemeClr val="accent1"/>
-          </a:lnRef>
-          <a:fillRef idx="3">
-            <a:schemeClr val="accent1"/>
-          </a:fillRef>
-          <a:effectRef idx="2">
-            <a:schemeClr val="accent1"/>
-          </a:effectRef>
-          <a:fontRef idx="minor">
-            <a:schemeClr val="lt1"/>
-          </a:fontRef>
-        </p:style>
-        <p:txBody>
-          <a:bodyPr rtlCol="0" anchor="ctr" lIns="0" rIns="0" tIns="0" bIns="0" wrap="square"/>
-          <a:lstStyle/>
-          <a:p>
-            <a:pPr algn="ctr"/>
-            <a:r>
-              <a:rPr sz="1300" b="1" i="0">
-                <a:solidFill>
-                  <a:srgbClr val="FFFFFF"/>
-                </a:solidFill>
-                <a:latin typeface="Arial"/>
-              </a:rPr>
-              <a:t>6</a:t>
-            </a:r>
-          </a:p>
-        </p:txBody>
-      </p:sp>
-      <p:sp>
-        <p:nvSpPr>
-          <p:cNvPr id="20" name="TextBox 19"/>
-          <p:cNvSpPr txBox="1"/>
-          <p:nvPr/>
-        </p:nvSpPr>
-        <p:spPr>
-          <a:xfrm>
-            <a:off x="1115568" y="5387340"/>
-            <a:ext cx="10527487" cy="739140"/>
-          </a:xfrm>
-          <a:prstGeom prst="rect">
-            <a:avLst/>
-          </a:prstGeom>
-          <a:noFill/>
-        </p:spPr>
-        <p:txBody>
-          <a:bodyPr wrap="square">
-            <a:spAutoFit/>
-          </a:bodyPr>
-          <a:lstStyle/>
-          <a:p>
-            <a:pPr>
-              <a:spcAft>
-                <a:spcPts val="300"/>
-              </a:spcAft>
-            </a:pPr>
-            <a:r>
-              <a:rPr sz="1900" b="1" i="0">
-                <a:solidFill>
-                  <a:srgbClr val="1A1A1A"/>
-                </a:solidFill>
-                <a:latin typeface="Arial"/>
-              </a:rPr>
-              <a:t>The working application.</a:t>
-            </a:r>
-          </a:p>
-        </p:txBody>
-      </p:sp>
-      <p:sp>
-        <p:nvSpPr>
-          <p:cNvPr id="21" name="TextBox 20"/>
           <p:cNvSpPr txBox="1"/>
           <p:nvPr/>
         </p:nvSpPr>
@@ -14446,7 +13143,7 @@
                 </a:solidFill>
                 <a:latin typeface="Arial"/>
               </a:rPr>
-              <a:t>Filled for PHEQA's registration of institutions</a:t>
+              <a:t>Nine points where PHEQA says yes</a:t>
             </a:r>
           </a:p>
         </p:txBody>
@@ -14460,7 +13157,7 @@
         <p:spPr>
           <a:xfrm>
             <a:off x="658368" y="1463040"/>
-            <a:ext cx="10984687" cy="1131570"/>
+            <a:ext cx="10984687" cy="1005839"/>
           </a:xfrm>
           <a:prstGeom prst="rect">
             <a:avLst/>
@@ -14479,13 +13176,13 @@
               </a:spcAft>
             </a:pPr>
             <a:r>
-              <a:rPr sz="1750" b="1" i="0">
+              <a:rPr sz="2200" b="1" i="0">
                 <a:solidFill>
                   <a:srgbClr val="1A1A1A"/>
                 </a:solidFill>
                 <a:latin typeface="Arial"/>
               </a:rPr>
-              <a:t>The register: an AI assistant extracts it; the supplier's analyst rules on each entry; the Registrar of PHEQA accepts.</a:t>
+              <a:t>Nine points where a person in PHEQA must say yes before the work goes on.</a:t>
             </a:r>
           </a:p>
         </p:txBody>
@@ -14498,7 +13195,7 @@
         </p:nvSpPr>
         <p:spPr>
           <a:xfrm>
-            <a:off x="621792" y="2599182"/>
+            <a:off x="621792" y="2473452"/>
             <a:ext cx="10881360" cy="12700"/>
           </a:xfrm>
           <a:prstGeom prst="rect">
@@ -14542,8 +13239,8 @@
         </p:nvSpPr>
         <p:spPr>
           <a:xfrm>
-            <a:off x="658368" y="2640330"/>
-            <a:ext cx="10984687" cy="1131570"/>
+            <a:off x="658368" y="2514600"/>
+            <a:ext cx="10984687" cy="1005839"/>
           </a:xfrm>
           <a:prstGeom prst="rect">
             <a:avLst/>
@@ -14562,186 +13259,20 @@
               </a:spcAft>
             </a:pPr>
             <a:r>
-              <a:rPr sz="1750" b="1" i="0">
+              <a:rPr sz="2200" b="1" i="0">
                 <a:solidFill>
                   <a:srgbClr val="1A1A1A"/>
                 </a:solidFill>
                 <a:latin typeface="Arial"/>
               </a:rPr>
-              <a:t>The screens of a goal: the analyst who wrote the goal; the review of three people decides.</a:t>
-            </a:r>
-          </a:p>
-        </p:txBody>
-      </p:sp>
-      <p:sp>
-        <p:nvSpPr>
-          <p:cNvPr id="7" name="Rectangle 6"/>
-          <p:cNvSpPr/>
-          <p:nvPr/>
-        </p:nvSpPr>
-        <p:spPr>
-          <a:xfrm>
-            <a:off x="621792" y="3776472"/>
-            <a:ext cx="10881360" cy="12700"/>
-          </a:xfrm>
-          <a:prstGeom prst="rect">
-            <a:avLst/>
-          </a:prstGeom>
-          <a:solidFill>
-            <a:srgbClr val="DDECF4"/>
-          </a:solidFill>
-          <a:ln>
-            <a:noFill/>
-          </a:ln>
-          <a:effectLst/>
-        </p:spPr>
-        <p:style>
-          <a:lnRef idx="1">
-            <a:schemeClr val="accent1"/>
-          </a:lnRef>
-          <a:fillRef idx="3">
-            <a:schemeClr val="accent1"/>
-          </a:fillRef>
-          <a:effectRef idx="2">
-            <a:schemeClr val="accent1"/>
-          </a:effectRef>
-          <a:fontRef idx="minor">
-            <a:schemeClr val="lt1"/>
-          </a:fontRef>
-        </p:style>
-        <p:txBody>
-          <a:bodyPr rtlCol="0" anchor="ctr"/>
-          <a:lstStyle/>
-          <a:p>
-            <a:pPr algn="ctr"/>
-          </a:p>
-        </p:txBody>
-      </p:sp>
-      <p:sp>
-        <p:nvSpPr>
-          <p:cNvPr id="8" name="TextBox 7"/>
-          <p:cNvSpPr txBox="1"/>
-          <p:nvPr/>
-        </p:nvSpPr>
-        <p:spPr>
-          <a:xfrm>
-            <a:off x="658368" y="3817620"/>
-            <a:ext cx="10984687" cy="1131570"/>
-          </a:xfrm>
-          <a:prstGeom prst="rect">
-            <a:avLst/>
-          </a:prstGeom>
-          <a:noFill/>
-        </p:spPr>
-        <p:txBody>
-          <a:bodyPr wrap="square">
-            <a:spAutoFit/>
-          </a:bodyPr>
-          <a:lstStyle/>
-          <a:p>
-            <a:pPr>
-              <a:spcAft>
-                <a:spcPts val="300"/>
-              </a:spcAft>
-            </a:pPr>
-            <a:r>
-              <a:rPr sz="1750" b="1" i="0">
-                <a:solidFill>
-                  <a:srgbClr val="1A1A1A"/>
-                </a:solidFill>
-                <a:latin typeface="Arial"/>
-              </a:rPr>
-              <a:t>The application model: an AI assistant writes it; the head of the ICT unit approves.</a:t>
-            </a:r>
-          </a:p>
-        </p:txBody>
-      </p:sp>
-      <p:sp>
-        <p:nvSpPr>
-          <p:cNvPr id="9" name="Rectangle 8"/>
-          <p:cNvSpPr/>
-          <p:nvPr/>
-        </p:nvSpPr>
-        <p:spPr>
-          <a:xfrm>
-            <a:off x="621792" y="4953762"/>
-            <a:ext cx="10881360" cy="12700"/>
-          </a:xfrm>
-          <a:prstGeom prst="rect">
-            <a:avLst/>
-          </a:prstGeom>
-          <a:solidFill>
-            <a:srgbClr val="DDECF4"/>
-          </a:solidFill>
-          <a:ln>
-            <a:noFill/>
-          </a:ln>
-          <a:effectLst/>
-        </p:spPr>
-        <p:style>
-          <a:lnRef idx="1">
-            <a:schemeClr val="accent1"/>
-          </a:lnRef>
-          <a:fillRef idx="3">
-            <a:schemeClr val="accent1"/>
-          </a:fillRef>
-          <a:effectRef idx="2">
-            <a:schemeClr val="accent1"/>
-          </a:effectRef>
-          <a:fontRef idx="minor">
-            <a:schemeClr val="lt1"/>
-          </a:fontRef>
-        </p:style>
-        <p:txBody>
-          <a:bodyPr rtlCol="0" anchor="ctr"/>
-          <a:lstStyle/>
-          <a:p>
-            <a:pPr algn="ctr"/>
-          </a:p>
-        </p:txBody>
-      </p:sp>
-      <p:sp>
-        <p:nvSpPr>
-          <p:cNvPr id="10" name="TextBox 9"/>
-          <p:cNvSpPr txBox="1"/>
-          <p:nvPr/>
-        </p:nvSpPr>
-        <p:spPr>
-          <a:xfrm>
-            <a:off x="658368" y="4994910"/>
-            <a:ext cx="10984687" cy="1131570"/>
-          </a:xfrm>
-          <a:prstGeom prst="rect">
-            <a:avLst/>
-          </a:prstGeom>
-          <a:noFill/>
-        </p:spPr>
-        <p:txBody>
-          <a:bodyPr wrap="square">
-            <a:spAutoFit/>
-          </a:bodyPr>
-          <a:lstStyle/>
-          <a:p>
-            <a:pPr>
-              <a:spcAft>
-                <a:spcPts val="300"/>
-              </a:spcAft>
-            </a:pPr>
-            <a:r>
-              <a:rPr sz="1750" b="1" i="0">
-                <a:solidFill>
-                  <a:srgbClr val="1A1A1A"/>
-                </a:solidFill>
-                <a:latin typeface="Arial"/>
-              </a:rPr>
-              <a:t>The working application: a registration officer finishes a real task on it.</a:t>
-            </a:r>
-          </a:p>
-        </p:txBody>
-      </p:sp>
-      <p:sp>
-        <p:nvSpPr>
-          <p:cNvPr id="11" name="TextBox 10"/>
+              <a:t>Two documents written by nobody: the walk-through and the working application.</a:t>
+            </a:r>
+          </a:p>
+        </p:txBody>
+      </p:sp>
+      <p:sp>
+        <p:nvSpPr>
+          <p:cNvPr id="7" name="TextBox 6"/>
           <p:cNvSpPr txBox="1"/>
           <p:nvPr/>
         </p:nvSpPr>
@@ -14782,258 +13313,6 @@
 </file>
 
 <file path=ppt/slides/slide34.xml><?xml version="1.0" encoding="utf-8"?>
-<p:sld xmlns:a="http://schemas.openxmlformats.org/drawingml/2006/main" xmlns:p="http://schemas.openxmlformats.org/presentationml/2006/main" xmlns:r="http://schemas.openxmlformats.org/officeDocument/2006/relationships">
-  <p:cSld>
-    <p:spTree>
-      <p:nvGrpSpPr>
-        <p:cNvPr id="1" name=""/>
-        <p:cNvGrpSpPr/>
-        <p:nvPr/>
-      </p:nvGrpSpPr>
-      <p:grpSpPr/>
-      <p:sp>
-        <p:nvSpPr>
-          <p:cNvPr id="2" name="Rectangle 1"/>
-          <p:cNvSpPr/>
-          <p:nvPr/>
-        </p:nvSpPr>
-        <p:spPr>
-          <a:xfrm>
-            <a:off x="457200" y="384048"/>
-            <a:ext cx="45720" cy="256032"/>
-          </a:xfrm>
-          <a:prstGeom prst="rect">
-            <a:avLst/>
-          </a:prstGeom>
-          <a:solidFill>
-            <a:srgbClr val="009CD6"/>
-          </a:solidFill>
-          <a:ln>
-            <a:noFill/>
-          </a:ln>
-          <a:effectLst/>
-        </p:spPr>
-        <p:style>
-          <a:lnRef idx="1">
-            <a:schemeClr val="accent1"/>
-          </a:lnRef>
-          <a:fillRef idx="3">
-            <a:schemeClr val="accent1"/>
-          </a:fillRef>
-          <a:effectRef idx="2">
-            <a:schemeClr val="accent1"/>
-          </a:effectRef>
-          <a:fontRef idx="minor">
-            <a:schemeClr val="lt1"/>
-          </a:fontRef>
-        </p:style>
-        <p:txBody>
-          <a:bodyPr rtlCol="0" anchor="ctr"/>
-          <a:lstStyle/>
-          <a:p>
-            <a:pPr algn="ctr"/>
-          </a:p>
-        </p:txBody>
-      </p:sp>
-      <p:sp>
-        <p:nvSpPr>
-          <p:cNvPr id="3" name="TextBox 2"/>
-          <p:cNvSpPr txBox="1"/>
-          <p:nvPr/>
-        </p:nvSpPr>
-        <p:spPr>
-          <a:xfrm>
-            <a:off x="621792" y="274320"/>
-            <a:ext cx="11247120" cy="914400"/>
-          </a:xfrm>
-          <a:prstGeom prst="rect">
-            <a:avLst/>
-          </a:prstGeom>
-          <a:noFill/>
-        </p:spPr>
-        <p:txBody>
-          <a:bodyPr wrap="square">
-            <a:spAutoFit/>
-          </a:bodyPr>
-          <a:lstStyle/>
-          <a:p>
-            <a:r>
-              <a:rPr sz="2800" b="1" i="0">
-                <a:solidFill>
-                  <a:srgbClr val="1A1A1A"/>
-                </a:solidFill>
-                <a:latin typeface="Arial"/>
-              </a:rPr>
-              <a:t>Nine points where PHEQA says yes</a:t>
-            </a:r>
-          </a:p>
-        </p:txBody>
-      </p:sp>
-      <p:sp>
-        <p:nvSpPr>
-          <p:cNvPr id="4" name="TextBox 3"/>
-          <p:cNvSpPr txBox="1"/>
-          <p:nvPr/>
-        </p:nvSpPr>
-        <p:spPr>
-          <a:xfrm>
-            <a:off x="658368" y="1463040"/>
-            <a:ext cx="10984687" cy="1005839"/>
-          </a:xfrm>
-          <a:prstGeom prst="rect">
-            <a:avLst/>
-          </a:prstGeom>
-          <a:noFill/>
-        </p:spPr>
-        <p:txBody>
-          <a:bodyPr wrap="square">
-            <a:spAutoFit/>
-          </a:bodyPr>
-          <a:lstStyle/>
-          <a:p>
-            <a:pPr>
-              <a:spcAft>
-                <a:spcPts val="300"/>
-              </a:spcAft>
-            </a:pPr>
-            <a:r>
-              <a:rPr sz="2200" b="1" i="0">
-                <a:solidFill>
-                  <a:srgbClr val="1A1A1A"/>
-                </a:solidFill>
-                <a:latin typeface="Arial"/>
-              </a:rPr>
-              <a:t>Nine points where a person in PHEQA must say yes before the work goes on.</a:t>
-            </a:r>
-          </a:p>
-        </p:txBody>
-      </p:sp>
-      <p:sp>
-        <p:nvSpPr>
-          <p:cNvPr id="5" name="Rectangle 4"/>
-          <p:cNvSpPr/>
-          <p:nvPr/>
-        </p:nvSpPr>
-        <p:spPr>
-          <a:xfrm>
-            <a:off x="621792" y="2473452"/>
-            <a:ext cx="10881360" cy="12700"/>
-          </a:xfrm>
-          <a:prstGeom prst="rect">
-            <a:avLst/>
-          </a:prstGeom>
-          <a:solidFill>
-            <a:srgbClr val="DDECF4"/>
-          </a:solidFill>
-          <a:ln>
-            <a:noFill/>
-          </a:ln>
-          <a:effectLst/>
-        </p:spPr>
-        <p:style>
-          <a:lnRef idx="1">
-            <a:schemeClr val="accent1"/>
-          </a:lnRef>
-          <a:fillRef idx="3">
-            <a:schemeClr val="accent1"/>
-          </a:fillRef>
-          <a:effectRef idx="2">
-            <a:schemeClr val="accent1"/>
-          </a:effectRef>
-          <a:fontRef idx="minor">
-            <a:schemeClr val="lt1"/>
-          </a:fontRef>
-        </p:style>
-        <p:txBody>
-          <a:bodyPr rtlCol="0" anchor="ctr"/>
-          <a:lstStyle/>
-          <a:p>
-            <a:pPr algn="ctr"/>
-          </a:p>
-        </p:txBody>
-      </p:sp>
-      <p:sp>
-        <p:nvSpPr>
-          <p:cNvPr id="6" name="TextBox 5"/>
-          <p:cNvSpPr txBox="1"/>
-          <p:nvPr/>
-        </p:nvSpPr>
-        <p:spPr>
-          <a:xfrm>
-            <a:off x="658368" y="2514600"/>
-            <a:ext cx="10984687" cy="1005839"/>
-          </a:xfrm>
-          <a:prstGeom prst="rect">
-            <a:avLst/>
-          </a:prstGeom>
-          <a:noFill/>
-        </p:spPr>
-        <p:txBody>
-          <a:bodyPr wrap="square">
-            <a:spAutoFit/>
-          </a:bodyPr>
-          <a:lstStyle/>
-          <a:p>
-            <a:pPr>
-              <a:spcAft>
-                <a:spcPts val="300"/>
-              </a:spcAft>
-            </a:pPr>
-            <a:r>
-              <a:rPr sz="2200" b="1" i="0">
-                <a:solidFill>
-                  <a:srgbClr val="1A1A1A"/>
-                </a:solidFill>
-                <a:latin typeface="Arial"/>
-              </a:rPr>
-              <a:t>Two documents written by nobody: the walk-through and the working application.</a:t>
-            </a:r>
-          </a:p>
-        </p:txBody>
-      </p:sp>
-      <p:sp>
-        <p:nvSpPr>
-          <p:cNvPr id="7" name="TextBox 6"/>
-          <p:cNvSpPr txBox="1"/>
-          <p:nvPr/>
-        </p:nvSpPr>
-        <p:spPr>
-          <a:xfrm>
-            <a:off x="457200" y="6473952"/>
-            <a:ext cx="7772400" cy="292608"/>
-          </a:xfrm>
-          <a:prstGeom prst="rect">
-            <a:avLst/>
-          </a:prstGeom>
-          <a:noFill/>
-        </p:spPr>
-        <p:txBody>
-          <a:bodyPr wrap="square">
-            <a:spAutoFit/>
-          </a:bodyPr>
-          <a:lstStyle/>
-          <a:p>
-            <a:r>
-              <a:rPr sz="900" b="0" i="0">
-                <a:solidFill>
-                  <a:srgbClr val="595959"/>
-                </a:solidFill>
-                <a:latin typeface="Arial"/>
-              </a:rPr>
-              <a:t>1.4 · Twelve documents from the request to the running service</a:t>
-            </a:r>
-          </a:p>
-        </p:txBody>
-      </p:sp>
-    </p:spTree>
-  </p:cSld>
-  <p:clrMapOvr>
-    <a:masterClrMapping/>
-  </p:clrMapOvr>
-</p:sld>
-</file>
-
-<file path=ppt/slides/slide35.xml><?xml version="1.0" encoding="utf-8"?>
 <p:sld xmlns:a="http://schemas.openxmlformats.org/drawingml/2006/main" xmlns:p="http://schemas.openxmlformats.org/presentationml/2006/main" xmlns:r="http://schemas.openxmlformats.org/officeDocument/2006/relationships">
   <p:cSld>
     <p:spTree>
